--- a/catalog/samples/opposing_chevrons.pptx
+++ b/catalog/samples/opposing_chevrons.pptx
@@ -1172,7 +1172,7 @@
           </a:p>
           <a:p>
             <a:r>
-              <a:t>  "template_sha256": "cae0932e5d45527ecdcc9d8e766433e266678736190ddc2dd7be119d6059366d"</a:t>
+              <a:t>  "template_sha256": "8a9bbb1708de1ce2d40c86e5884d4081385fc70048f87e4a0de1559cab5c013f"</a:t>
             </a:r>
           </a:p>
           <a:p>
